--- a/docs/Olist_report.pptx
+++ b/docs/Olist_report.pptx
@@ -5470,7 +5470,7 @@
                 <a:latin typeface="Calibri" pitchFamily="34" charset="0"/>
                 <a:cs typeface="Calibri" pitchFamily="34" charset="-120"/>
               </a:rPr>
-              <a:t>~1</a:t>
+              <a:t>1</a:t>
             </a:r>
             <a:endParaRPr lang="en-US" sz="2200" dirty="0"/>
           </a:p>
